--- a/Documentacao/Prototipo.pptx
+++ b/Documentacao/Prototipo.pptx
@@ -4807,54 +4807,18 @@
         </p:spPr>
         <p:style>
           <a:lnRef idx="2">
-            <a:schemeClr val="dk1"/>
+            <a:schemeClr val="dk1">
+              <a:shade val="50000"/>
+            </a:schemeClr>
           </a:lnRef>
           <a:fillRef idx="1">
-            <a:schemeClr val="lt1"/>
+            <a:schemeClr val="dk1"/>
           </a:fillRef>
           <a:effectRef idx="0">
             <a:schemeClr val="dk1"/>
           </a:effectRef>
           <a:fontRef idx="minor">
-            <a:schemeClr val="dk1"/>
-          </a:fontRef>
-        </p:style>
-        <p:txBody>
-          <a:bodyPr rtlCol="0" anchor="ctr"/>
-          <a:lstStyle/>
-          <a:p>
-            <a:pPr algn="ctr"/>
-            <a:endParaRPr lang="pt-BR"/>
-          </a:p>
-        </p:txBody>
-      </p:sp>
-      <p:sp>
-        <p:nvSpPr>
-          <p:cNvPr id="26" name="Retângulo 25"/>
-          <p:cNvSpPr/>
-          <p:nvPr/>
-        </p:nvSpPr>
-        <p:spPr>
-          <a:xfrm>
-            <a:off x="4714876" y="2214554"/>
-            <a:ext cx="642942" cy="428628"/>
-          </a:xfrm>
-          <a:prstGeom prst="rect">
-            <a:avLst/>
-          </a:prstGeom>
-        </p:spPr>
-        <p:style>
-          <a:lnRef idx="2">
-            <a:schemeClr val="dk1"/>
-          </a:lnRef>
-          <a:fillRef idx="1">
             <a:schemeClr val="lt1"/>
-          </a:fillRef>
-          <a:effectRef idx="0">
-            <a:schemeClr val="dk1"/>
-          </a:effectRef>
-          <a:fontRef idx="minor">
-            <a:schemeClr val="dk1"/>
           </a:fontRef>
         </p:style>
         <p:txBody>
